--- a/slides.pptx
+++ b/slides.pptx
@@ -7,6 +7,7 @@
   <p:sldIdLst>
     <p:sldId id="257" r:id="rId2"/>
     <p:sldId id="258" r:id="rId3"/>
+    <p:sldId id="259" r:id="rId4"/>
   </p:sldIdLst>
   <p:sldSz cx="12192000" cy="6858000"/>
   <p:notesSz cx="6858000" cy="9144000"/>
@@ -105,6 +106,11 @@
       </a:defRPr>
     </a:lvl9pPr>
   </p:defaultTextStyle>
+  <p:extLst>
+    <p:ext uri="{EFAFB233-063F-42B5-8137-9DF3F51BA10A}">
+      <p15:sldGuideLst xmlns:p15="http://schemas.microsoft.com/office/powerpoint/2012/main"/>
+    </p:ext>
+  </p:extLst>
 </p:presentation>
 </file>
 
@@ -255,7 +261,7 @@
           <a:p>
             <a:fld id="{D94DAA0D-4BB2-FF4E-8607-8965FDA93A69}" type="datetimeFigureOut">
               <a:rPr lang="en-US" smtClean="0"/>
-              <a:t>11/25/25</a:t>
+              <a:t>11/26/25</a:t>
             </a:fld>
             <a:endParaRPr lang="en-US"/>
           </a:p>
@@ -453,7 +459,7 @@
           <a:p>
             <a:fld id="{D94DAA0D-4BB2-FF4E-8607-8965FDA93A69}" type="datetimeFigureOut">
               <a:rPr lang="en-US" smtClean="0"/>
-              <a:t>11/25/25</a:t>
+              <a:t>11/26/25</a:t>
             </a:fld>
             <a:endParaRPr lang="en-US"/>
           </a:p>
@@ -661,7 +667,7 @@
           <a:p>
             <a:fld id="{D94DAA0D-4BB2-FF4E-8607-8965FDA93A69}" type="datetimeFigureOut">
               <a:rPr lang="en-US" smtClean="0"/>
-              <a:t>11/25/25</a:t>
+              <a:t>11/26/25</a:t>
             </a:fld>
             <a:endParaRPr lang="en-US"/>
           </a:p>
@@ -859,7 +865,7 @@
           <a:p>
             <a:fld id="{D94DAA0D-4BB2-FF4E-8607-8965FDA93A69}" type="datetimeFigureOut">
               <a:rPr lang="en-US" smtClean="0"/>
-              <a:t>11/25/25</a:t>
+              <a:t>11/26/25</a:t>
             </a:fld>
             <a:endParaRPr lang="en-US"/>
           </a:p>
@@ -1134,7 +1140,7 @@
           <a:p>
             <a:fld id="{D94DAA0D-4BB2-FF4E-8607-8965FDA93A69}" type="datetimeFigureOut">
               <a:rPr lang="en-US" smtClean="0"/>
-              <a:t>11/25/25</a:t>
+              <a:t>11/26/25</a:t>
             </a:fld>
             <a:endParaRPr lang="en-US"/>
           </a:p>
@@ -1399,7 +1405,7 @@
           <a:p>
             <a:fld id="{D94DAA0D-4BB2-FF4E-8607-8965FDA93A69}" type="datetimeFigureOut">
               <a:rPr lang="en-US" smtClean="0"/>
-              <a:t>11/25/25</a:t>
+              <a:t>11/26/25</a:t>
             </a:fld>
             <a:endParaRPr lang="en-US"/>
           </a:p>
@@ -1811,7 +1817,7 @@
           <a:p>
             <a:fld id="{D94DAA0D-4BB2-FF4E-8607-8965FDA93A69}" type="datetimeFigureOut">
               <a:rPr lang="en-US" smtClean="0"/>
-              <a:t>11/25/25</a:t>
+              <a:t>11/26/25</a:t>
             </a:fld>
             <a:endParaRPr lang="en-US"/>
           </a:p>
@@ -1952,7 +1958,7 @@
           <a:p>
             <a:fld id="{D94DAA0D-4BB2-FF4E-8607-8965FDA93A69}" type="datetimeFigureOut">
               <a:rPr lang="en-US" smtClean="0"/>
-              <a:t>11/25/25</a:t>
+              <a:t>11/26/25</a:t>
             </a:fld>
             <a:endParaRPr lang="en-US"/>
           </a:p>
@@ -2065,7 +2071,7 @@
           <a:p>
             <a:fld id="{D94DAA0D-4BB2-FF4E-8607-8965FDA93A69}" type="datetimeFigureOut">
               <a:rPr lang="en-US" smtClean="0"/>
-              <a:t>11/25/25</a:t>
+              <a:t>11/26/25</a:t>
             </a:fld>
             <a:endParaRPr lang="en-US"/>
           </a:p>
@@ -2376,7 +2382,7 @@
           <a:p>
             <a:fld id="{D94DAA0D-4BB2-FF4E-8607-8965FDA93A69}" type="datetimeFigureOut">
               <a:rPr lang="en-US" smtClean="0"/>
-              <a:t>11/25/25</a:t>
+              <a:t>11/26/25</a:t>
             </a:fld>
             <a:endParaRPr lang="en-US"/>
           </a:p>
@@ -2664,7 +2670,7 @@
           <a:p>
             <a:fld id="{D94DAA0D-4BB2-FF4E-8607-8965FDA93A69}" type="datetimeFigureOut">
               <a:rPr lang="en-US" smtClean="0"/>
-              <a:t>11/25/25</a:t>
+              <a:t>11/26/25</a:t>
             </a:fld>
             <a:endParaRPr lang="en-US"/>
           </a:p>
@@ -2905,7 +2911,7 @@
           <a:p>
             <a:fld id="{D94DAA0D-4BB2-FF4E-8607-8965FDA93A69}" type="datetimeFigureOut">
               <a:rPr lang="en-US" smtClean="0"/>
-              <a:t>11/25/25</a:t>
+              <a:t>11/26/25</a:t>
             </a:fld>
             <a:endParaRPr lang="en-US"/>
           </a:p>
@@ -25613,6 +25619,400 @@
 </p:sld>
 </file>
 
+<file path=ppt/slides/slide3.xml><?xml version="1.0" encoding="utf-8"?>
+<p:sld xmlns:a="http://schemas.openxmlformats.org/drawingml/2006/main" xmlns:r="http://schemas.openxmlformats.org/officeDocument/2006/relationships" xmlns:p="http://schemas.openxmlformats.org/presentationml/2006/main">
+  <p:cSld>
+    <p:bg>
+      <p:bgPr>
+        <a:solidFill>
+          <a:schemeClr val="bg1"/>
+        </a:solidFill>
+        <a:effectLst/>
+      </p:bgPr>
+    </p:bg>
+    <p:spTree>
+      <p:nvGrpSpPr>
+        <p:cNvPr id="1" name=""/>
+        <p:cNvGrpSpPr/>
+        <p:nvPr/>
+      </p:nvGrpSpPr>
+      <p:grpSpPr>
+        <a:xfrm>
+          <a:off x="0" y="0"/>
+          <a:ext cx="0" cy="0"/>
+          <a:chOff x="0" y="0"/>
+          <a:chExt cx="0" cy="0"/>
+        </a:xfrm>
+      </p:grpSpPr>
+      <p:sp useBgFill="1">
+        <p:nvSpPr>
+          <p:cNvPr id="21" name="Rectangle 20">
+            <a:extLst>
+              <a:ext uri="{FF2B5EF4-FFF2-40B4-BE49-F238E27FC236}">
+                <a16:creationId xmlns:a16="http://schemas.microsoft.com/office/drawing/2014/main" id="{F0A604E4-7307-451C-93BE-F1F7E1BF3BF8}"/>
+              </a:ext>
+              <a:ext uri="{C183D7F6-B498-43B3-948B-1728B52AA6E4}">
+                <adec:decorative xmlns:adec="http://schemas.microsoft.com/office/drawing/2017/decorative" val="1"/>
+              </a:ext>
+            </a:extLst>
+          </p:cNvPr>
+          <p:cNvSpPr>
+            <a:spLocks noGrp="1" noRot="1" noChangeAspect="1" noMove="1" noResize="1" noEditPoints="1" noAdjustHandles="1" noChangeArrowheads="1" noChangeShapeType="1" noTextEdit="1"/>
+          </p:cNvSpPr>
+          <p:nvPr>
+            <p:extLst>
+              <p:ext uri="{386F3935-93C4-4BCD-93E2-E3B085C9AB24}">
+                <p16:designElem xmlns:p16="http://schemas.microsoft.com/office/powerpoint/2015/main" val="1"/>
+              </p:ext>
+            </p:extLst>
+          </p:nvPr>
+        </p:nvSpPr>
+        <p:spPr>
+          <a:xfrm>
+            <a:off x="-2" y="0"/>
+            <a:ext cx="12192004" cy="6858000"/>
+          </a:xfrm>
+          <a:prstGeom prst="rect">
+            <a:avLst/>
+          </a:prstGeom>
+          <a:ln>
+            <a:noFill/>
+          </a:ln>
+        </p:spPr>
+        <p:style>
+          <a:lnRef idx="2">
+            <a:schemeClr val="accent1">
+              <a:shade val="50000"/>
+            </a:schemeClr>
+          </a:lnRef>
+          <a:fillRef idx="1">
+            <a:schemeClr val="accent1"/>
+          </a:fillRef>
+          <a:effectRef idx="0">
+            <a:schemeClr val="accent1"/>
+          </a:effectRef>
+          <a:fontRef idx="minor">
+            <a:schemeClr val="lt1"/>
+          </a:fontRef>
+        </p:style>
+        <p:txBody>
+          <a:bodyPr rtlCol="0" anchor="ctr"/>
+          <a:lstStyle/>
+          <a:p>
+            <a:pPr algn="ctr"/>
+            <a:endParaRPr lang="en-US"/>
+          </a:p>
+        </p:txBody>
+      </p:sp>
+      <p:sp>
+        <p:nvSpPr>
+          <p:cNvPr id="23" name="Rectangle 22">
+            <a:extLst>
+              <a:ext uri="{FF2B5EF4-FFF2-40B4-BE49-F238E27FC236}">
+                <a16:creationId xmlns:a16="http://schemas.microsoft.com/office/drawing/2014/main" id="{F7F3A0AA-35E5-4085-942B-737839030604}"/>
+              </a:ext>
+              <a:ext uri="{C183D7F6-B498-43B3-948B-1728B52AA6E4}">
+                <adec:decorative xmlns:adec="http://schemas.microsoft.com/office/drawing/2017/decorative" val="1"/>
+              </a:ext>
+            </a:extLst>
+          </p:cNvPr>
+          <p:cNvSpPr>
+            <a:spLocks noGrp="1" noRot="1" noChangeAspect="1" noMove="1" noResize="1" noEditPoints="1" noAdjustHandles="1" noChangeArrowheads="1" noChangeShapeType="1" noTextEdit="1"/>
+          </p:cNvSpPr>
+          <p:nvPr>
+            <p:extLst>
+              <p:ext uri="{386F3935-93C4-4BCD-93E2-E3B085C9AB24}">
+                <p16:designElem xmlns:p16="http://schemas.microsoft.com/office/powerpoint/2015/main" val="1"/>
+              </p:ext>
+            </p:extLst>
+          </p:nvPr>
+        </p:nvSpPr>
+        <p:spPr>
+          <a:xfrm flipH="1">
+            <a:off x="-1" y="5282344"/>
+            <a:ext cx="12191998" cy="1590742"/>
+          </a:xfrm>
+          <a:prstGeom prst="rect">
+            <a:avLst/>
+          </a:prstGeom>
+          <a:gradFill>
+            <a:gsLst>
+              <a:gs pos="34000">
+                <a:srgbClr val="000000">
+                  <a:alpha val="96000"/>
+                </a:srgbClr>
+              </a:gs>
+              <a:gs pos="100000">
+                <a:schemeClr val="accent1"/>
+              </a:gs>
+            </a:gsLst>
+            <a:lin ang="8400000" scaled="0"/>
+          </a:gradFill>
+          <a:ln>
+            <a:noFill/>
+          </a:ln>
+        </p:spPr>
+        <p:style>
+          <a:lnRef idx="2">
+            <a:schemeClr val="accent1">
+              <a:shade val="50000"/>
+            </a:schemeClr>
+          </a:lnRef>
+          <a:fillRef idx="1">
+            <a:schemeClr val="accent1"/>
+          </a:fillRef>
+          <a:effectRef idx="0">
+            <a:schemeClr val="accent1"/>
+          </a:effectRef>
+          <a:fontRef idx="minor">
+            <a:schemeClr val="lt1"/>
+          </a:fontRef>
+        </p:style>
+        <p:txBody>
+          <a:bodyPr rtlCol="0" anchor="ctr"/>
+          <a:lstStyle/>
+          <a:p>
+            <a:pPr algn="ctr"/>
+            <a:endParaRPr lang="en-US"/>
+          </a:p>
+        </p:txBody>
+      </p:sp>
+      <p:sp>
+        <p:nvSpPr>
+          <p:cNvPr id="25" name="Rectangle 24">
+            <a:extLst>
+              <a:ext uri="{FF2B5EF4-FFF2-40B4-BE49-F238E27FC236}">
+                <a16:creationId xmlns:a16="http://schemas.microsoft.com/office/drawing/2014/main" id="{402F5C38-C747-4173-ABBF-656E39E82130}"/>
+              </a:ext>
+              <a:ext uri="{C183D7F6-B498-43B3-948B-1728B52AA6E4}">
+                <adec:decorative xmlns:adec="http://schemas.microsoft.com/office/drawing/2017/decorative" val="1"/>
+              </a:ext>
+            </a:extLst>
+          </p:cNvPr>
+          <p:cNvSpPr>
+            <a:spLocks noGrp="1" noRot="1" noChangeAspect="1" noMove="1" noResize="1" noEditPoints="1" noAdjustHandles="1" noChangeArrowheads="1" noChangeShapeType="1" noTextEdit="1"/>
+          </p:cNvSpPr>
+          <p:nvPr>
+            <p:extLst>
+              <p:ext uri="{386F3935-93C4-4BCD-93E2-E3B085C9AB24}">
+                <p16:designElem xmlns:p16="http://schemas.microsoft.com/office/powerpoint/2015/main" val="1"/>
+              </p:ext>
+            </p:extLst>
+          </p:nvPr>
+        </p:nvSpPr>
+        <p:spPr>
+          <a:xfrm flipH="1">
+            <a:off x="-4" y="5282344"/>
+            <a:ext cx="8115300" cy="1590742"/>
+          </a:xfrm>
+          <a:prstGeom prst="rect">
+            <a:avLst/>
+          </a:prstGeom>
+          <a:gradFill>
+            <a:gsLst>
+              <a:gs pos="28000">
+                <a:schemeClr val="accent1">
+                  <a:lumMod val="75000"/>
+                  <a:alpha val="59000"/>
+                </a:schemeClr>
+              </a:gs>
+              <a:gs pos="100000">
+                <a:srgbClr val="000000">
+                  <a:alpha val="70000"/>
+                </a:srgbClr>
+              </a:gs>
+            </a:gsLst>
+            <a:lin ang="11400000" scaled="0"/>
+          </a:gradFill>
+          <a:ln>
+            <a:noFill/>
+          </a:ln>
+        </p:spPr>
+        <p:style>
+          <a:lnRef idx="2">
+            <a:schemeClr val="accent1">
+              <a:shade val="50000"/>
+            </a:schemeClr>
+          </a:lnRef>
+          <a:fillRef idx="1">
+            <a:schemeClr val="accent1"/>
+          </a:fillRef>
+          <a:effectRef idx="0">
+            <a:schemeClr val="accent1"/>
+          </a:effectRef>
+          <a:fontRef idx="minor">
+            <a:schemeClr val="lt1"/>
+          </a:fontRef>
+        </p:style>
+        <p:txBody>
+          <a:bodyPr rtlCol="0" anchor="ctr"/>
+          <a:lstStyle/>
+          <a:p>
+            <a:pPr algn="ctr"/>
+            <a:endParaRPr lang="en-US"/>
+          </a:p>
+        </p:txBody>
+      </p:sp>
+      <p:sp>
+        <p:nvSpPr>
+          <p:cNvPr id="27" name="Rectangle 26">
+            <a:extLst>
+              <a:ext uri="{FF2B5EF4-FFF2-40B4-BE49-F238E27FC236}">
+                <a16:creationId xmlns:a16="http://schemas.microsoft.com/office/drawing/2014/main" id="{E37EECFC-A684-4391-AE85-4CDAF5565F61}"/>
+              </a:ext>
+              <a:ext uri="{C183D7F6-B498-43B3-948B-1728B52AA6E4}">
+                <adec:decorative xmlns:adec="http://schemas.microsoft.com/office/drawing/2017/decorative" val="1"/>
+              </a:ext>
+            </a:extLst>
+          </p:cNvPr>
+          <p:cNvSpPr>
+            <a:spLocks noGrp="1" noRot="1" noChangeAspect="1" noMove="1" noResize="1" noEditPoints="1" noAdjustHandles="1" noChangeArrowheads="1" noChangeShapeType="1" noTextEdit="1"/>
+          </p:cNvSpPr>
+          <p:nvPr>
+            <p:extLst>
+              <p:ext uri="{386F3935-93C4-4BCD-93E2-E3B085C9AB24}">
+                <p16:designElem xmlns:p16="http://schemas.microsoft.com/office/powerpoint/2015/main" val="1"/>
+              </p:ext>
+            </p:extLst>
+          </p:nvPr>
+        </p:nvSpPr>
+        <p:spPr>
+          <a:xfrm flipH="1">
+            <a:off x="-4" y="5282344"/>
+            <a:ext cx="12191998" cy="1590742"/>
+          </a:xfrm>
+          <a:prstGeom prst="rect">
+            <a:avLst/>
+          </a:prstGeom>
+          <a:gradFill>
+            <a:gsLst>
+              <a:gs pos="0">
+                <a:srgbClr val="000000">
+                  <a:alpha val="71765"/>
+                </a:srgbClr>
+              </a:gs>
+              <a:gs pos="100000">
+                <a:schemeClr val="accent1">
+                  <a:alpha val="0"/>
+                </a:schemeClr>
+              </a:gs>
+            </a:gsLst>
+            <a:lin ang="15600000" scaled="0"/>
+          </a:gradFill>
+          <a:ln>
+            <a:noFill/>
+          </a:ln>
+        </p:spPr>
+        <p:style>
+          <a:lnRef idx="2">
+            <a:schemeClr val="accent1">
+              <a:shade val="50000"/>
+            </a:schemeClr>
+          </a:lnRef>
+          <a:fillRef idx="1">
+            <a:schemeClr val="accent1"/>
+          </a:fillRef>
+          <a:effectRef idx="0">
+            <a:schemeClr val="accent1"/>
+          </a:effectRef>
+          <a:fontRef idx="minor">
+            <a:schemeClr val="lt1"/>
+          </a:fontRef>
+        </p:style>
+        <p:txBody>
+          <a:bodyPr rtlCol="0" anchor="ctr"/>
+          <a:lstStyle/>
+          <a:p>
+            <a:pPr algn="ctr"/>
+            <a:endParaRPr lang="en-US"/>
+          </a:p>
+        </p:txBody>
+      </p:sp>
+      <p:sp>
+        <p:nvSpPr>
+          <p:cNvPr id="2" name="Title 1">
+            <a:extLst>
+              <a:ext uri="{FF2B5EF4-FFF2-40B4-BE49-F238E27FC236}">
+                <a16:creationId xmlns:a16="http://schemas.microsoft.com/office/drawing/2014/main" id="{03AFE9DC-3EAC-F79C-9800-125A1284827D}"/>
+              </a:ext>
+            </a:extLst>
+          </p:cNvPr>
+          <p:cNvSpPr>
+            <a:spLocks noGrp="1"/>
+          </p:cNvSpPr>
+          <p:nvPr>
+            <p:ph type="title"/>
+          </p:nvPr>
+        </p:nvSpPr>
+        <p:spPr>
+          <a:xfrm>
+            <a:off x="699714" y="5490971"/>
+            <a:ext cx="6962072" cy="1159200"/>
+          </a:xfrm>
+        </p:spPr>
+        <p:txBody>
+          <a:bodyPr vert="horz" lIns="91440" tIns="45720" rIns="91440" bIns="45720" rtlCol="0" anchor="ctr">
+            <a:normAutofit/>
+          </a:bodyPr>
+          <a:lstStyle/>
+          <a:p>
+            <a:r>
+              <a:rPr lang="en-US" sz="4000" kern="1200" dirty="0">
+                <a:solidFill>
+                  <a:srgbClr val="FFFFFF"/>
+                </a:solidFill>
+                <a:latin typeface="+mj-lt"/>
+                <a:ea typeface="+mj-ea"/>
+                <a:cs typeface="+mj-cs"/>
+              </a:rPr>
+              <a:t>UML Diagram</a:t>
+            </a:r>
+          </a:p>
+        </p:txBody>
+      </p:sp>
+      <p:pic>
+        <p:nvPicPr>
+          <p:cNvPr id="5" name="Picture 4" descr="A diagram of a computer program&#10;&#10;AI-generated content may be incorrect.">
+            <a:extLst>
+              <a:ext uri="{FF2B5EF4-FFF2-40B4-BE49-F238E27FC236}">
+                <a16:creationId xmlns:a16="http://schemas.microsoft.com/office/drawing/2014/main" id="{AEF532E5-F50D-3E82-4DDA-41ED5F6D2809}"/>
+              </a:ext>
+            </a:extLst>
+          </p:cNvPr>
+          <p:cNvPicPr>
+            <a:picLocks noChangeAspect="1"/>
+          </p:cNvPicPr>
+          <p:nvPr/>
+        </p:nvPicPr>
+        <p:blipFill>
+          <a:blip r:embed="rId2"/>
+          <a:stretch>
+            <a:fillRect/>
+          </a:stretch>
+        </p:blipFill>
+        <p:spPr>
+          <a:xfrm>
+            <a:off x="649274" y="0"/>
+            <a:ext cx="10916598" cy="5267258"/>
+          </a:xfrm>
+          <a:prstGeom prst="rect">
+            <a:avLst/>
+          </a:prstGeom>
+        </p:spPr>
+      </p:pic>
+    </p:spTree>
+    <p:extLst>
+      <p:ext uri="{BB962C8B-B14F-4D97-AF65-F5344CB8AC3E}">
+        <p14:creationId xmlns:p14="http://schemas.microsoft.com/office/powerpoint/2010/main" val="215769522"/>
+      </p:ext>
+    </p:extLst>
+  </p:cSld>
+  <p:clrMapOvr>
+    <a:masterClrMapping/>
+  </p:clrMapOvr>
+</p:sld>
+</file>
+
 <file path=ppt/theme/theme1.xml><?xml version="1.0" encoding="utf-8"?>
 <a:theme xmlns:a="http://schemas.openxmlformats.org/drawingml/2006/main" name="Office Theme">
   <a:themeElements>

--- a/slides.pptx
+++ b/slides.pptx
@@ -7,7 +7,6 @@
   <p:sldIdLst>
     <p:sldId id="257" r:id="rId2"/>
     <p:sldId id="258" r:id="rId3"/>
-    <p:sldId id="259" r:id="rId4"/>
   </p:sldIdLst>
   <p:sldSz cx="12192000" cy="6858000"/>
   <p:notesSz cx="6858000" cy="9144000"/>
@@ -25619,400 +25618,6 @@
 </p:sld>
 </file>
 
-<file path=ppt/slides/slide3.xml><?xml version="1.0" encoding="utf-8"?>
-<p:sld xmlns:a="http://schemas.openxmlformats.org/drawingml/2006/main" xmlns:r="http://schemas.openxmlformats.org/officeDocument/2006/relationships" xmlns:p="http://schemas.openxmlformats.org/presentationml/2006/main">
-  <p:cSld>
-    <p:bg>
-      <p:bgPr>
-        <a:solidFill>
-          <a:schemeClr val="bg1"/>
-        </a:solidFill>
-        <a:effectLst/>
-      </p:bgPr>
-    </p:bg>
-    <p:spTree>
-      <p:nvGrpSpPr>
-        <p:cNvPr id="1" name=""/>
-        <p:cNvGrpSpPr/>
-        <p:nvPr/>
-      </p:nvGrpSpPr>
-      <p:grpSpPr>
-        <a:xfrm>
-          <a:off x="0" y="0"/>
-          <a:ext cx="0" cy="0"/>
-          <a:chOff x="0" y="0"/>
-          <a:chExt cx="0" cy="0"/>
-        </a:xfrm>
-      </p:grpSpPr>
-      <p:sp useBgFill="1">
-        <p:nvSpPr>
-          <p:cNvPr id="21" name="Rectangle 20">
-            <a:extLst>
-              <a:ext uri="{FF2B5EF4-FFF2-40B4-BE49-F238E27FC236}">
-                <a16:creationId xmlns:a16="http://schemas.microsoft.com/office/drawing/2014/main" id="{F0A604E4-7307-451C-93BE-F1F7E1BF3BF8}"/>
-              </a:ext>
-              <a:ext uri="{C183D7F6-B498-43B3-948B-1728B52AA6E4}">
-                <adec:decorative xmlns:adec="http://schemas.microsoft.com/office/drawing/2017/decorative" val="1"/>
-              </a:ext>
-            </a:extLst>
-          </p:cNvPr>
-          <p:cNvSpPr>
-            <a:spLocks noGrp="1" noRot="1" noChangeAspect="1" noMove="1" noResize="1" noEditPoints="1" noAdjustHandles="1" noChangeArrowheads="1" noChangeShapeType="1" noTextEdit="1"/>
-          </p:cNvSpPr>
-          <p:nvPr>
-            <p:extLst>
-              <p:ext uri="{386F3935-93C4-4BCD-93E2-E3B085C9AB24}">
-                <p16:designElem xmlns:p16="http://schemas.microsoft.com/office/powerpoint/2015/main" val="1"/>
-              </p:ext>
-            </p:extLst>
-          </p:nvPr>
-        </p:nvSpPr>
-        <p:spPr>
-          <a:xfrm>
-            <a:off x="-2" y="0"/>
-            <a:ext cx="12192004" cy="6858000"/>
-          </a:xfrm>
-          <a:prstGeom prst="rect">
-            <a:avLst/>
-          </a:prstGeom>
-          <a:ln>
-            <a:noFill/>
-          </a:ln>
-        </p:spPr>
-        <p:style>
-          <a:lnRef idx="2">
-            <a:schemeClr val="accent1">
-              <a:shade val="50000"/>
-            </a:schemeClr>
-          </a:lnRef>
-          <a:fillRef idx="1">
-            <a:schemeClr val="accent1"/>
-          </a:fillRef>
-          <a:effectRef idx="0">
-            <a:schemeClr val="accent1"/>
-          </a:effectRef>
-          <a:fontRef idx="minor">
-            <a:schemeClr val="lt1"/>
-          </a:fontRef>
-        </p:style>
-        <p:txBody>
-          <a:bodyPr rtlCol="0" anchor="ctr"/>
-          <a:lstStyle/>
-          <a:p>
-            <a:pPr algn="ctr"/>
-            <a:endParaRPr lang="en-US"/>
-          </a:p>
-        </p:txBody>
-      </p:sp>
-      <p:sp>
-        <p:nvSpPr>
-          <p:cNvPr id="23" name="Rectangle 22">
-            <a:extLst>
-              <a:ext uri="{FF2B5EF4-FFF2-40B4-BE49-F238E27FC236}">
-                <a16:creationId xmlns:a16="http://schemas.microsoft.com/office/drawing/2014/main" id="{F7F3A0AA-35E5-4085-942B-737839030604}"/>
-              </a:ext>
-              <a:ext uri="{C183D7F6-B498-43B3-948B-1728B52AA6E4}">
-                <adec:decorative xmlns:adec="http://schemas.microsoft.com/office/drawing/2017/decorative" val="1"/>
-              </a:ext>
-            </a:extLst>
-          </p:cNvPr>
-          <p:cNvSpPr>
-            <a:spLocks noGrp="1" noRot="1" noChangeAspect="1" noMove="1" noResize="1" noEditPoints="1" noAdjustHandles="1" noChangeArrowheads="1" noChangeShapeType="1" noTextEdit="1"/>
-          </p:cNvSpPr>
-          <p:nvPr>
-            <p:extLst>
-              <p:ext uri="{386F3935-93C4-4BCD-93E2-E3B085C9AB24}">
-                <p16:designElem xmlns:p16="http://schemas.microsoft.com/office/powerpoint/2015/main" val="1"/>
-              </p:ext>
-            </p:extLst>
-          </p:nvPr>
-        </p:nvSpPr>
-        <p:spPr>
-          <a:xfrm flipH="1">
-            <a:off x="-1" y="5282344"/>
-            <a:ext cx="12191998" cy="1590742"/>
-          </a:xfrm>
-          <a:prstGeom prst="rect">
-            <a:avLst/>
-          </a:prstGeom>
-          <a:gradFill>
-            <a:gsLst>
-              <a:gs pos="34000">
-                <a:srgbClr val="000000">
-                  <a:alpha val="96000"/>
-                </a:srgbClr>
-              </a:gs>
-              <a:gs pos="100000">
-                <a:schemeClr val="accent1"/>
-              </a:gs>
-            </a:gsLst>
-            <a:lin ang="8400000" scaled="0"/>
-          </a:gradFill>
-          <a:ln>
-            <a:noFill/>
-          </a:ln>
-        </p:spPr>
-        <p:style>
-          <a:lnRef idx="2">
-            <a:schemeClr val="accent1">
-              <a:shade val="50000"/>
-            </a:schemeClr>
-          </a:lnRef>
-          <a:fillRef idx="1">
-            <a:schemeClr val="accent1"/>
-          </a:fillRef>
-          <a:effectRef idx="0">
-            <a:schemeClr val="accent1"/>
-          </a:effectRef>
-          <a:fontRef idx="minor">
-            <a:schemeClr val="lt1"/>
-          </a:fontRef>
-        </p:style>
-        <p:txBody>
-          <a:bodyPr rtlCol="0" anchor="ctr"/>
-          <a:lstStyle/>
-          <a:p>
-            <a:pPr algn="ctr"/>
-            <a:endParaRPr lang="en-US"/>
-          </a:p>
-        </p:txBody>
-      </p:sp>
-      <p:sp>
-        <p:nvSpPr>
-          <p:cNvPr id="25" name="Rectangle 24">
-            <a:extLst>
-              <a:ext uri="{FF2B5EF4-FFF2-40B4-BE49-F238E27FC236}">
-                <a16:creationId xmlns:a16="http://schemas.microsoft.com/office/drawing/2014/main" id="{402F5C38-C747-4173-ABBF-656E39E82130}"/>
-              </a:ext>
-              <a:ext uri="{C183D7F6-B498-43B3-948B-1728B52AA6E4}">
-                <adec:decorative xmlns:adec="http://schemas.microsoft.com/office/drawing/2017/decorative" val="1"/>
-              </a:ext>
-            </a:extLst>
-          </p:cNvPr>
-          <p:cNvSpPr>
-            <a:spLocks noGrp="1" noRot="1" noChangeAspect="1" noMove="1" noResize="1" noEditPoints="1" noAdjustHandles="1" noChangeArrowheads="1" noChangeShapeType="1" noTextEdit="1"/>
-          </p:cNvSpPr>
-          <p:nvPr>
-            <p:extLst>
-              <p:ext uri="{386F3935-93C4-4BCD-93E2-E3B085C9AB24}">
-                <p16:designElem xmlns:p16="http://schemas.microsoft.com/office/powerpoint/2015/main" val="1"/>
-              </p:ext>
-            </p:extLst>
-          </p:nvPr>
-        </p:nvSpPr>
-        <p:spPr>
-          <a:xfrm flipH="1">
-            <a:off x="-4" y="5282344"/>
-            <a:ext cx="8115300" cy="1590742"/>
-          </a:xfrm>
-          <a:prstGeom prst="rect">
-            <a:avLst/>
-          </a:prstGeom>
-          <a:gradFill>
-            <a:gsLst>
-              <a:gs pos="28000">
-                <a:schemeClr val="accent1">
-                  <a:lumMod val="75000"/>
-                  <a:alpha val="59000"/>
-                </a:schemeClr>
-              </a:gs>
-              <a:gs pos="100000">
-                <a:srgbClr val="000000">
-                  <a:alpha val="70000"/>
-                </a:srgbClr>
-              </a:gs>
-            </a:gsLst>
-            <a:lin ang="11400000" scaled="0"/>
-          </a:gradFill>
-          <a:ln>
-            <a:noFill/>
-          </a:ln>
-        </p:spPr>
-        <p:style>
-          <a:lnRef idx="2">
-            <a:schemeClr val="accent1">
-              <a:shade val="50000"/>
-            </a:schemeClr>
-          </a:lnRef>
-          <a:fillRef idx="1">
-            <a:schemeClr val="accent1"/>
-          </a:fillRef>
-          <a:effectRef idx="0">
-            <a:schemeClr val="accent1"/>
-          </a:effectRef>
-          <a:fontRef idx="minor">
-            <a:schemeClr val="lt1"/>
-          </a:fontRef>
-        </p:style>
-        <p:txBody>
-          <a:bodyPr rtlCol="0" anchor="ctr"/>
-          <a:lstStyle/>
-          <a:p>
-            <a:pPr algn="ctr"/>
-            <a:endParaRPr lang="en-US"/>
-          </a:p>
-        </p:txBody>
-      </p:sp>
-      <p:sp>
-        <p:nvSpPr>
-          <p:cNvPr id="27" name="Rectangle 26">
-            <a:extLst>
-              <a:ext uri="{FF2B5EF4-FFF2-40B4-BE49-F238E27FC236}">
-                <a16:creationId xmlns:a16="http://schemas.microsoft.com/office/drawing/2014/main" id="{E37EECFC-A684-4391-AE85-4CDAF5565F61}"/>
-              </a:ext>
-              <a:ext uri="{C183D7F6-B498-43B3-948B-1728B52AA6E4}">
-                <adec:decorative xmlns:adec="http://schemas.microsoft.com/office/drawing/2017/decorative" val="1"/>
-              </a:ext>
-            </a:extLst>
-          </p:cNvPr>
-          <p:cNvSpPr>
-            <a:spLocks noGrp="1" noRot="1" noChangeAspect="1" noMove="1" noResize="1" noEditPoints="1" noAdjustHandles="1" noChangeArrowheads="1" noChangeShapeType="1" noTextEdit="1"/>
-          </p:cNvSpPr>
-          <p:nvPr>
-            <p:extLst>
-              <p:ext uri="{386F3935-93C4-4BCD-93E2-E3B085C9AB24}">
-                <p16:designElem xmlns:p16="http://schemas.microsoft.com/office/powerpoint/2015/main" val="1"/>
-              </p:ext>
-            </p:extLst>
-          </p:nvPr>
-        </p:nvSpPr>
-        <p:spPr>
-          <a:xfrm flipH="1">
-            <a:off x="-4" y="5282344"/>
-            <a:ext cx="12191998" cy="1590742"/>
-          </a:xfrm>
-          <a:prstGeom prst="rect">
-            <a:avLst/>
-          </a:prstGeom>
-          <a:gradFill>
-            <a:gsLst>
-              <a:gs pos="0">
-                <a:srgbClr val="000000">
-                  <a:alpha val="71765"/>
-                </a:srgbClr>
-              </a:gs>
-              <a:gs pos="100000">
-                <a:schemeClr val="accent1">
-                  <a:alpha val="0"/>
-                </a:schemeClr>
-              </a:gs>
-            </a:gsLst>
-            <a:lin ang="15600000" scaled="0"/>
-          </a:gradFill>
-          <a:ln>
-            <a:noFill/>
-          </a:ln>
-        </p:spPr>
-        <p:style>
-          <a:lnRef idx="2">
-            <a:schemeClr val="accent1">
-              <a:shade val="50000"/>
-            </a:schemeClr>
-          </a:lnRef>
-          <a:fillRef idx="1">
-            <a:schemeClr val="accent1"/>
-          </a:fillRef>
-          <a:effectRef idx="0">
-            <a:schemeClr val="accent1"/>
-          </a:effectRef>
-          <a:fontRef idx="minor">
-            <a:schemeClr val="lt1"/>
-          </a:fontRef>
-        </p:style>
-        <p:txBody>
-          <a:bodyPr rtlCol="0" anchor="ctr"/>
-          <a:lstStyle/>
-          <a:p>
-            <a:pPr algn="ctr"/>
-            <a:endParaRPr lang="en-US"/>
-          </a:p>
-        </p:txBody>
-      </p:sp>
-      <p:sp>
-        <p:nvSpPr>
-          <p:cNvPr id="2" name="Title 1">
-            <a:extLst>
-              <a:ext uri="{FF2B5EF4-FFF2-40B4-BE49-F238E27FC236}">
-                <a16:creationId xmlns:a16="http://schemas.microsoft.com/office/drawing/2014/main" id="{03AFE9DC-3EAC-F79C-9800-125A1284827D}"/>
-              </a:ext>
-            </a:extLst>
-          </p:cNvPr>
-          <p:cNvSpPr>
-            <a:spLocks noGrp="1"/>
-          </p:cNvSpPr>
-          <p:nvPr>
-            <p:ph type="title"/>
-          </p:nvPr>
-        </p:nvSpPr>
-        <p:spPr>
-          <a:xfrm>
-            <a:off x="699714" y="5490971"/>
-            <a:ext cx="6962072" cy="1159200"/>
-          </a:xfrm>
-        </p:spPr>
-        <p:txBody>
-          <a:bodyPr vert="horz" lIns="91440" tIns="45720" rIns="91440" bIns="45720" rtlCol="0" anchor="ctr">
-            <a:normAutofit/>
-          </a:bodyPr>
-          <a:lstStyle/>
-          <a:p>
-            <a:r>
-              <a:rPr lang="en-US" sz="4000" kern="1200" dirty="0">
-                <a:solidFill>
-                  <a:srgbClr val="FFFFFF"/>
-                </a:solidFill>
-                <a:latin typeface="+mj-lt"/>
-                <a:ea typeface="+mj-ea"/>
-                <a:cs typeface="+mj-cs"/>
-              </a:rPr>
-              <a:t>UML Diagram</a:t>
-            </a:r>
-          </a:p>
-        </p:txBody>
-      </p:sp>
-      <p:pic>
-        <p:nvPicPr>
-          <p:cNvPr id="5" name="Picture 4" descr="A diagram of a computer program&#10;&#10;AI-generated content may be incorrect.">
-            <a:extLst>
-              <a:ext uri="{FF2B5EF4-FFF2-40B4-BE49-F238E27FC236}">
-                <a16:creationId xmlns:a16="http://schemas.microsoft.com/office/drawing/2014/main" id="{AEF532E5-F50D-3E82-4DDA-41ED5F6D2809}"/>
-              </a:ext>
-            </a:extLst>
-          </p:cNvPr>
-          <p:cNvPicPr>
-            <a:picLocks noChangeAspect="1"/>
-          </p:cNvPicPr>
-          <p:nvPr/>
-        </p:nvPicPr>
-        <p:blipFill>
-          <a:blip r:embed="rId2"/>
-          <a:stretch>
-            <a:fillRect/>
-          </a:stretch>
-        </p:blipFill>
-        <p:spPr>
-          <a:xfrm>
-            <a:off x="649274" y="0"/>
-            <a:ext cx="10916598" cy="5267258"/>
-          </a:xfrm>
-          <a:prstGeom prst="rect">
-            <a:avLst/>
-          </a:prstGeom>
-        </p:spPr>
-      </p:pic>
-    </p:spTree>
-    <p:extLst>
-      <p:ext uri="{BB962C8B-B14F-4D97-AF65-F5344CB8AC3E}">
-        <p14:creationId xmlns:p14="http://schemas.microsoft.com/office/powerpoint/2010/main" val="215769522"/>
-      </p:ext>
-    </p:extLst>
-  </p:cSld>
-  <p:clrMapOvr>
-    <a:masterClrMapping/>
-  </p:clrMapOvr>
-</p:sld>
-</file>
-
 <file path=ppt/theme/theme1.xml><?xml version="1.0" encoding="utf-8"?>
 <a:theme xmlns:a="http://schemas.openxmlformats.org/drawingml/2006/main" name="Office Theme">
   <a:themeElements>
